--- a/brain/library/internal/one-pagers/Senior Living and Home Care Operating Software April 2026.pptx
+++ b/brain/library/internal/one-pagers/Senior Living and Home Care Operating Software April 2026.pptx
@@ -15117,7 +15117,7 @@
                         <a:rPr b="1" lang="en-US" sz="1400" u="none" cap="none" strike="noStrike">
                           <a:solidFill/>
                         </a:rPr>
-                        <a:t>Assessment: Pending Scoring</a:t>
+                        <a:t>Assessment: 2.24 / 3.0 (75%)</a:t>
                       </a:r>
                       <a:r>
                         <a:rPr b="1" lang="en-US">
